--- a/DBTUNING/ch04_SQL성능측정/ch04_교안.pptx
+++ b/DBTUNING/ch04_SQL성능측정/ch04_교안.pptx
@@ -612,7 +612,7 @@
           <a:lstStyle/>
           <a:p>
             <a:r>
-              <a:t>EXPLAIN PLAN은 계획을 PLAN_TABLE에 저장만 하고 화면에 아무것도 뿌리지 않으므로, 반드시 DISPLAY를 이어서 호출해야 한다는 점을 짚어 준다. 여기서 나오는 Rows는 옵티마이저가 통계정보를 근거로 예상한 값이지 실제로 나온 행 수가 아니다. 학습자가 가장 자주 혼동하는 지점이 바로 이 Rows 컬럼인데, 13장에서 다룬 통계정보가 낡으면 이 값이 크게 어긋난다는 사실과 함께 설명하면 이해가 붙는다. 실측이 필요한 자리에 이 값을 근거로 들이대는 실수는 실무에서도 흔하다.</a:t>
+              <a:t>EXPLAIN PLAN은 계획을 PLAN_TABLE에 저장만 하고 화면에 아무것도 뿌리지 않으므로, 반드시 DISPLAY를 이어서 호출해야 한다는 점을 짚어 준다. 여기서 나오는 Rows는 옵티마이저가 통계정보를 근거로 예상한 값이지 실제로 나온 행 수가 아니다. 학습자가 가장 자주 혼동하는 지점이 바로 이 Rows 컬럼인데, ch08에서 다룬 통계정보가 낡으면 이 값이 크게 어긋난다는 사실과 함께 설명하면 이해가 붙는다. 실측이 필요한 자리에 이 값을 근거로 들이대는 실수는 실무에서도 흔하다.</a:t>
             </a:r>
           </a:p>
         </p:txBody>
@@ -2852,7 +2852,7 @@
           <a:lstStyle/>
           <a:p>
             <a:r>
-              <a:t>첫 절은 이 장의 존재 이유를 세우는 구간이다. 이 과정은 1장부터 Buffers를 사실상 단일 통화처럼 써 왔는데, 그 통화만으로 계산되지 않는 비용을 이미 여러 번 만났다. 그 미결 항목을 마지막 장에서 정면으로 처리한다는 구성임을 밝혀 주면 학습자가 앞 장들과의 연결을 스스로 떠올린다. 여기서는 결론을 미리 말하지 말고 "왜 같은 계획인데 시간이 다른가"라는 질문만 남겨 두는 편이 좋다. 절 제목을 그대로 학습자에게 던져 놓고 각자 어떤 근거를 대는지 몇 개 받아 적어 두면, 뒤의 실측 결과와 대조할 재료가 생긴다.</a:t>
+              <a:t>첫 절은 이 장의 존재 이유를 세우는 구간이다. 이 과정은 ch01부터 Buffers를 사실상 단일 통화처럼 써 왔는데, 그 통화만으로 계산되지 않는 비용을 이미 여러 번 만났다. 그 미결 항목을 마지막 장에서 정면으로 처리한다는 구성임을 밝혀 주면 학습자가 앞 장들과의 연결을 스스로 떠올린다. 여기서는 결론을 미리 말하지 말고 "왜 같은 계획인데 시간이 다른가"라는 질문만 남겨 두는 편이 좋다. 절 제목을 그대로 학습자에게 던져 놓고 각자 어떤 근거를 대는지 몇 개 받아 적어 두면, 뒤의 실측 결과와 대조할 재료가 생긴다.</a:t>
             </a:r>
           </a:p>
         </p:txBody>
@@ -3132,7 +3132,7 @@
           <a:lstStyle/>
           <a:p>
             <a:r>
-              <a:t>Chapter 1의 IN과 EXISTS 사례를 다시 꺼내 보여 주면 효과가 크다. 당시 학습자들은 대부분 EXISTS가 원래 빠른 문법이라고 결론을 내렸는데, 실제로는 두 계획이 동일했고 먼저 실행된 쪽이 블록을 캐시에 올려 준 순서 효과였다. 이 장을 마치면 그 현상을 캐시 효과라는 뭉뚱그린 말이 아니라 Logical I/O와 Physical I/O의 차이로 정확히 설명할 수 있게 된다. 해설 6번 문제가 정확히 이 연결을 묻는다는 점도 함께 안내한다.</a:t>
+              <a:t>ch01의 IN과 EXISTS 사례를 다시 꺼내 보여 주면 효과가 크다. 당시 학습자들은 대부분 EXISTS가 원래 빠른 문법이라고 결론을 내렸는데, 실제로는 두 계획이 동일했고 먼저 실행된 쪽이 블록을 캐시에 올려 준 순서 효과였다. 이 장을 마치면 그 현상을 캐시 효과라는 뭉뚱그린 말이 아니라 Logical I/O와 Physical I/O의 차이로 정확히 설명할 수 있게 된다. 해설 6번 문제가 정확히 이 연결을 묻는다는 점도 함께 안내한다.</a:t>
             </a:r>
           </a:p>
         </p:txBody>
@@ -6429,7 +6429,7 @@
                 </a:solidFill>
                 <a:latin typeface="Malgun Gothic"/>
               </a:rPr>
-              <a:t>Oracle SQL 튜닝 과정  ·  제14장</a:t>
+              <a:t>Oracle SQL 튜닝 과정  ·  제ch04</a:t>
             </a:r>
           </a:p>
         </p:txBody>
@@ -7320,7 +7320,7 @@
                 </a:solidFill>
                 <a:latin typeface="Malgun Gothic"/>
               </a:rPr>
-              <a:t>    –  E-Rows와 A-Rows의 괴리가 크면 통계정보 문제를 의심한다 (Chapter 3·13)</a:t>
+              <a:t>    –  E-Rows와 A-Rows의 괴리가 크면 통계정보 문제를 의심한다 (ch03·ch08)</a:t>
             </a:r>
           </a:p>
           <a:p>
@@ -8710,7 +8710,7 @@
                 </a:solidFill>
                 <a:latin typeface="Malgun Gothic"/>
               </a:rPr>
-              <a:t>•  Chapter 1에서 이미 관찰한 현상의 근본 원인이 바로 이것이다</a:t>
+              <a:t>•  ch01에서 이미 관찰한 현상의 근본 원인이 바로 이것이다</a:t>
             </a:r>
           </a:p>
           <a:p>
@@ -12023,7 +12023,7 @@
                 </a:solidFill>
                 <a:latin typeface="Malgun Gothic"/>
               </a:rPr>
-              <a:t>    –  Chapter 1 — IN vs EXISTS의 캐시 효과</a:t>
+              <a:t>    –  ch01 — IN vs EXISTS의 캐시 효과</a:t>
             </a:r>
           </a:p>
           <a:p>
@@ -12034,7 +12034,7 @@
                 </a:solidFill>
                 <a:latin typeface="Malgun Gothic"/>
               </a:rPr>
-              <a:t>    –  Chapter 9 — SORT UNIQUE</a:t>
+              <a:t>    –  ch11 — SORT UNIQUE</a:t>
             </a:r>
           </a:p>
           <a:p>
@@ -12045,7 +12045,7 @@
                 </a:solidFill>
                 <a:latin typeface="Malgun Gothic"/>
               </a:rPr>
-              <a:t>    –  Chapter 11 — WINDOW SORT PUSHED RANK</a:t>
+              <a:t>    –  ch13 — WINDOW SORT PUSHED RANK</a:t>
             </a:r>
           </a:p>
           <a:p>
@@ -14137,7 +14137,7 @@
                 </a:solidFill>
                 <a:latin typeface="Malgun Gothic"/>
               </a:rPr>
-              <a:t>    –  Ch1~3   SQL 튜닝의 정의 · SQL 실행 원리 · 실행계획 기초</a:t>
+              <a:t>    –  ch01~ch03   SQL 튜닝의 정의 · SQL 실행 원리 · 실행계획 기초</a:t>
             </a:r>
           </a:p>
           <a:p>
@@ -14148,7 +14148,7 @@
                 </a:solidFill>
                 <a:latin typeface="Malgun Gothic"/>
               </a:rPr>
-              <a:t>    –  Ch13     Optimizer와 통계정보 — 추정이 어긋나는 이유</a:t>
+              <a:t>    –  ch08     Optimizer와 통계정보 — 추정이 어긋나는 이유</a:t>
             </a:r>
           </a:p>
           <a:p>
@@ -14170,7 +14170,7 @@
                 </a:solidFill>
                 <a:latin typeface="Malgun Gothic"/>
               </a:rPr>
-              <a:t>    –  Ch4~6   Full Scan vs Index Scan · 인덱스 설계 · SARGable SQL</a:t>
+              <a:t>    –  ch05~ch07   Full Scan vs Index Scan · 인덱스 설계 · SARGable SQL</a:t>
             </a:r>
           </a:p>
           <a:p>
@@ -14181,7 +14181,7 @@
                 </a:solidFill>
                 <a:latin typeface="Malgun Gothic"/>
               </a:rPr>
-              <a:t>    –  Ch7~8   JOIN 실행 원리 · Subquery / EXISTS / IN</a:t>
+              <a:t>    –  ch09~ch10   JOIN 실행 원리 · Subquery / EXISTS / IN</a:t>
             </a:r>
           </a:p>
           <a:p>
@@ -14192,7 +14192,7 @@
                 </a:solidFill>
                 <a:latin typeface="Malgun Gothic"/>
               </a:rPr>
-              <a:t>    –  Ch9~11  UNION / DISTINCT · SORT / GROUP BY / 집계 · 페이징 SQL 튜닝</a:t>
+              <a:t>    –  ch11~ch13  UNION / DISTINCT · SORT / GROUP BY / 집계 · 페이징 SQL 튜닝</a:t>
             </a:r>
           </a:p>
           <a:p>
@@ -14203,7 +14203,7 @@
                 </a:solidFill>
                 <a:latin typeface="Malgun Gothic"/>
               </a:rPr>
-              <a:t>    –  Ch12     실무에서 자주 발생하는 SQL 문제</a:t>
+              <a:t>    –  ch14     실무에서 자주 발생하는 SQL 문제</a:t>
             </a:r>
           </a:p>
           <a:p>
@@ -14225,7 +14225,7 @@
                 </a:solidFill>
                 <a:latin typeface="Malgun Gothic"/>
               </a:rPr>
-              <a:t>    –  Ch14     이 장 — 도구와 지표, 그리고 측정 조건의 통제</a:t>
+              <a:t>    –  ch04     이 장 — 도구와 지표, 그리고 측정 조건의 통제</a:t>
             </a:r>
           </a:p>
         </p:txBody>
@@ -14568,7 +14568,7 @@
                 </a:solidFill>
                 <a:latin typeface="Malgun Gothic"/>
               </a:rPr>
-              <a:t>    –  Chapter 2부터 계속 지켜 온 구분이며, 성과 증명에는 반드시 실측을 쓴다</a:t>
+              <a:t>    –  ch02부터 계속 지켜 온 구분이며, 성과 증명에는 반드시 실측을 쓴다</a:t>
             </a:r>
           </a:p>
           <a:p>
@@ -14794,7 +14794,7 @@
                 </a:solidFill>
                 <a:latin typeface="Malgun Gothic"/>
               </a:rPr>
-              <a:t>•  SQL튜닝_Ch14_문제.md — 10문항, 전부 서술형</a:t>
+              <a:t>•  ch04_문제.md — 10문항, 전부 서술형</a:t>
             </a:r>
           </a:p>
           <a:p>
@@ -14893,7 +14893,7 @@
                 </a:solidFill>
                 <a:latin typeface="Malgun Gothic"/>
               </a:rPr>
-              <a:t>•  해설: SQL튜닝_Ch14_해설.md — 문항 번호가 1:1로 대응한다</a:t>
+              <a:t>•  해설: ch04_해설.md — 문항 번호가 1:1로 대응한다</a:t>
             </a:r>
           </a:p>
         </p:txBody>
@@ -15031,7 +15031,7 @@
                 </a:solidFill>
                 <a:latin typeface="Malgun Gothic"/>
               </a:rPr>
-              <a:t>•  이 과정은 Chapter 1부터 Buffers를 핵심 지표로 계속 사용해 왔다</a:t>
+              <a:t>•  이 과정은 ch01부터 Buffers를 핵심 지표로 계속 사용해 왔다</a:t>
             </a:r>
           </a:p>
           <a:p>
@@ -15064,7 +15064,7 @@
                 </a:solidFill>
                 <a:latin typeface="Malgun Gothic"/>
               </a:rPr>
-              <a:t>•  그런데 Chapter 9·11에서 이미 "Buffers만으로는 안 보이는 비용"을 여러 번 확인했다</a:t>
+              <a:t>•  그런데 ch11·ch13에서 이미 "Buffers만으로는 안 보이는 비용"을 여러 번 확인했다</a:t>
             </a:r>
           </a:p>
           <a:p>
@@ -15246,7 +15246,7 @@
                 </a:solidFill>
                 <a:latin typeface="Malgun Gothic"/>
               </a:rPr>
-              <a:t>•  Chapter 1 — IN vs EXISTS</a:t>
+              <a:t>•  ch01 — IN vs EXISTS</a:t>
             </a:r>
           </a:p>
           <a:p>
@@ -15279,7 +15279,7 @@
                 </a:solidFill>
                 <a:latin typeface="Malgun Gothic"/>
               </a:rPr>
-              <a:t>•  Chapter 9 — SORT UNIQUE</a:t>
+              <a:t>•  ch11 — SORT UNIQUE</a:t>
             </a:r>
           </a:p>
           <a:p>
@@ -15301,7 +15301,7 @@
                 </a:solidFill>
                 <a:latin typeface="Malgun Gothic"/>
               </a:rPr>
-              <a:t>•  Chapter 11 — WINDOW SORT PUSHED RANK</a:t>
+              <a:t>•  ch13 — WINDOW SORT PUSHED RANK</a:t>
             </a:r>
           </a:p>
           <a:p>
@@ -16102,7 +16102,7 @@
                 </a:solidFill>
                 <a:latin typeface="Malgun Gothic"/>
               </a:rPr>
-              <a:t>•  이 구분은 Chapter 2부터 계속 사용해 온 원칙이다</a:t>
+              <a:t>•  이 구분은 ch02부터 계속 사용해 온 원칙이다</a:t>
             </a:r>
           </a:p>
           <a:p>

--- a/DBTUNING/ch04_SQL성능측정/ch04_교안.pptx
+++ b/DBTUNING/ch04_SQL성능측정/ch04_교안.pptx
@@ -6429,7 +6429,7 @@
                 </a:solidFill>
                 <a:latin typeface="Malgun Gothic"/>
               </a:rPr>
-              <a:t>Oracle SQL 튜닝 과정  ·  제ch04</a:t>
+              <a:t>Oracle SQL 튜닝 과정  ·  ch04</a:t>
             </a:r>
           </a:p>
         </p:txBody>
